--- a/retrieval-picture-prompts-template.pptx
+++ b/retrieval-picture-prompts-template.pptx
@@ -2,13 +2,13 @@
 <file path=ppt/presentation.xml><?xml version="1.0" encoding="utf-8"?>
 <p:presentation xmlns:p="http://schemas.openxmlformats.org/presentationml/2006/main">
   <p:sldMasterIdLst>
-    <p:sldMasterId xmlns:r="http://schemas.openxmlformats.org/officeDocument/2006/relationships" id="2147483648" r:id="R94b115548558406a"/>
+    <p:sldMasterId xmlns:r="http://schemas.openxmlformats.org/officeDocument/2006/relationships" id="2147483648" r:id="R23ec919c67b4485f"/>
   </p:sldMasterIdLst>
   <p:notesMasterIdLst>
-    <p:notesMasterId xmlns:r="http://schemas.openxmlformats.org/officeDocument/2006/relationships" r:id="R822ab033da714fbb"/>
+    <p:notesMasterId xmlns:r="http://schemas.openxmlformats.org/officeDocument/2006/relationships" r:id="R3738576ba20f4446"/>
   </p:notesMasterIdLst>
   <p:sldIdLst>
-    <p:sldId xmlns:r="http://schemas.openxmlformats.org/officeDocument/2006/relationships" id="256" r:id="R868006a15e9c4423"/>
+    <p:sldId xmlns:r="http://schemas.openxmlformats.org/officeDocument/2006/relationships" id="256" r:id="Rf5178f784a2b4a47"/>
   </p:sldIdLst>
   <p:sldSz cx="12192000" cy="6858000"/>
   <p:notesSz cx="6858000" cy="9144000"/>
@@ -442,62 +442,7 @@
           <a:lstStyle xmlns:a="http://schemas.openxmlformats.org/drawingml/2006/main"/>
           <a:p xmlns:a="http://schemas.openxmlformats.org/drawingml/2006/main">
             <a:r>
-              <a:t>Teacher setup: Replace bracketed text before teaching. All text and shapes are editable. Duplicate the slide for answers or another prompt. For card activities, separate prompt and answer sides before printing.</a:t>
-            </a:r>
-          </a:p>
-          <a:p xmlns:a="http://schemas.openxmlformats.org/drawingml/2006/main">
-            <a:r>
-              <a:t/>
-            </a:r>
-          </a:p>
-          <a:p xmlns:a="http://schemas.openxmlformats.org/drawingml/2006/main">
-            <a:r>
-              <a:t>Materials: A relevant image with answer labels hidden</a:t>
-            </a:r>
-          </a:p>
-          <a:p xmlns:a="http://schemas.openxmlformats.org/drawingml/2006/main">
-            <a:r>
-              <a:t>Suggested time including feedback: 6 minutes.</a:t>
-            </a:r>
-          </a:p>
-          <a:p xmlns:a="http://schemas.openxmlformats.org/drawingml/2006/main">
-            <a:r>
-              <a:t/>
-            </a:r>
-          </a:p>
-          <a:p xmlns:a="http://schemas.openxmlformats.org/drawingml/2006/main">
-            <a:r>
-              <a:t>1. Choose the image: Use a diagram or photograph connected to taught material; hide answer labels.</a:t>
-            </a:r>
-          </a:p>
-          <a:p xmlns:a="http://schemas.openxmlformats.org/drawingml/2006/main">
-            <a:r>
-              <a:t>2. Recall details: Students write remembered labels, steps or explanations independently.</a:t>
-            </a:r>
-          </a:p>
-          <a:p xmlns:a="http://schemas.openxmlformats.org/drawingml/2006/main">
-            <a:r>
-              <a:t>3. Explain connections: Ask learners to connect the visual to the taught ideas.</a:t>
-            </a:r>
-          </a:p>
-          <a:p xmlns:a="http://schemas.openxmlformats.org/drawingml/2006/main">
-            <a:r>
-              <a:t>4. Reveal and check: Show a checked explanation and correct mistakes.</a:t>
-            </a:r>
-          </a:p>
-          <a:p xmlns:a="http://schemas.openxmlformats.org/drawingml/2006/main">
-            <a:r>
-              <a:t/>
-            </a:r>
-          </a:p>
-          <a:p xmlns:a="http://schemas.openxmlformats.org/drawingml/2006/main">
-            <a:r>
-              <a:t>Check: An image containing all the answers can turn the task into copying. Keep the initial cue useful without revealing the target knowledge.</a:t>
-            </a:r>
-          </a:p>
-          <a:p xmlns:a="http://schemas.openxmlformats.org/drawingml/2006/main">
-            <a:r>
-              <a:t>Adapt: Provide a verbal description or accessible alternative to the image.</a:t>
+              <a:t>Replace bracketed text with your own taught prompts and checked answers. All labels and response areas are editable. Give everyone an independent attempt before revealing answers. Duplicate the slide for answers or another prompt. For cards, print the prompt and answer on opposite sides or fold them to keep answers hidden.</a:t>
             </a:r>
           </a:p>
         </p:txBody>
@@ -544,7 +489,7 @@
           <p:cNvPr id="4" name="Accent rule">
             <a:extLst xmlns:a="http://schemas.openxmlformats.org/drawingml/2006/main">
               <a:ext uri="{FF2B5EF4-FFF2-40B4-BE49-F238E27FC236}">
-                <a16:creationId xmlns:a16="http://schemas.microsoft.com/office/drawing/2014/main" id="{B36816A6-9471-45E2-9767-86CC7DDE5A9A}"/>
+                <a16:creationId xmlns:a16="http://schemas.microsoft.com/office/drawing/2014/main" id="{5AD3A25A-E935-4598-AA73-D9002DEF05B6}"/>
               </a:ext>
             </a:extLst>
           </p:cNvPr>
@@ -575,7 +520,7 @@
           <p:cNvPr id="2" name="Title">
             <a:extLst xmlns:a="http://schemas.openxmlformats.org/drawingml/2006/main">
               <a:ext uri="{FF2B5EF4-FFF2-40B4-BE49-F238E27FC236}">
-                <a16:creationId xmlns:a16="http://schemas.microsoft.com/office/drawing/2014/main" id="{59CDE0CA-7FAB-45BE-BBB3-6EA18712174E}"/>
+                <a16:creationId xmlns:a16="http://schemas.microsoft.com/office/drawing/2014/main" id="{7B415B97-DA75-4F9A-875D-1766B3314CA3}"/>
               </a:ext>
             </a:extLst>
           </p:cNvPr>
@@ -722,7 +667,7 @@
           <p:cNvPr id="3" name="Subtitle">
             <a:extLst xmlns:a="http://schemas.openxmlformats.org/drawingml/2006/main">
               <a:ext uri="{FF2B5EF4-FFF2-40B4-BE49-F238E27FC236}">
-                <a16:creationId xmlns:a16="http://schemas.microsoft.com/office/drawing/2014/main" id="{6DB82491-70FB-4EA4-B8ED-891B4DBD34B7}"/>
+                <a16:creationId xmlns:a16="http://schemas.microsoft.com/office/drawing/2014/main" id="{9B59FA2C-7A2F-4618-8C88-6ED57BD59327}"/>
               </a:ext>
             </a:extLst>
           </p:cNvPr>
@@ -886,7 +831,7 @@
           <p:cNvPr id="3" name="Accent rule">
             <a:extLst xmlns:a="http://schemas.openxmlformats.org/drawingml/2006/main">
               <a:ext uri="{FF2B5EF4-FFF2-40B4-BE49-F238E27FC236}">
-                <a16:creationId xmlns:a16="http://schemas.microsoft.com/office/drawing/2014/main" id="{12E6F6AC-FA21-4400-A2F5-854C6C4F7082}"/>
+                <a16:creationId xmlns:a16="http://schemas.microsoft.com/office/drawing/2014/main" id="{6BC61FA3-92B4-446E-A0DC-E4C6AA6D3958}"/>
               </a:ext>
             </a:extLst>
           </p:cNvPr>
@@ -917,7 +862,7 @@
           <p:cNvPr id="2" name="Section title">
             <a:extLst xmlns:a="http://schemas.openxmlformats.org/drawingml/2006/main">
               <a:ext uri="{FF2B5EF4-FFF2-40B4-BE49-F238E27FC236}">
-                <a16:creationId xmlns:a16="http://schemas.microsoft.com/office/drawing/2014/main" id="{1EF78C8B-CD20-48AD-A824-213BB90A13DB}"/>
+                <a16:creationId xmlns:a16="http://schemas.microsoft.com/office/drawing/2014/main" id="{589FB87B-599D-4B9D-88FE-91018C640452}"/>
               </a:ext>
             </a:extLst>
           </p:cNvPr>
@@ -1081,7 +1026,7 @@
           <p:cNvPr id="4" name="Accent rule">
             <a:extLst xmlns:a="http://schemas.openxmlformats.org/drawingml/2006/main">
               <a:ext uri="{FF2B5EF4-FFF2-40B4-BE49-F238E27FC236}">
-                <a16:creationId xmlns:a16="http://schemas.microsoft.com/office/drawing/2014/main" id="{01FA48EF-0169-46F8-9DDF-E2FE78246DD3}"/>
+                <a16:creationId xmlns:a16="http://schemas.microsoft.com/office/drawing/2014/main" id="{9771C671-A706-4F47-89BC-6092FBBFA25B}"/>
               </a:ext>
             </a:extLst>
           </p:cNvPr>
@@ -1112,7 +1057,7 @@
           <p:cNvPr id="2" name="Title">
             <a:extLst xmlns:a="http://schemas.openxmlformats.org/drawingml/2006/main">
               <a:ext uri="{FF2B5EF4-FFF2-40B4-BE49-F238E27FC236}">
-                <a16:creationId xmlns:a16="http://schemas.microsoft.com/office/drawing/2014/main" id="{9B46916C-C2F3-4D01-8633-37108EAE0835}"/>
+                <a16:creationId xmlns:a16="http://schemas.microsoft.com/office/drawing/2014/main" id="{5E4D1244-B7DC-408A-8049-6CBA53308E86}"/>
               </a:ext>
             </a:extLst>
           </p:cNvPr>
@@ -1259,7 +1204,7 @@
           <p:cNvPr id="3" name="Body">
             <a:extLst xmlns:a="http://schemas.openxmlformats.org/drawingml/2006/main">
               <a:ext uri="{FF2B5EF4-FFF2-40B4-BE49-F238E27FC236}">
-                <a16:creationId xmlns:a16="http://schemas.microsoft.com/office/drawing/2014/main" id="{F27CA6E7-4B2A-4C53-B3A4-D5956FE5A4A8}"/>
+                <a16:creationId xmlns:a16="http://schemas.microsoft.com/office/drawing/2014/main" id="{9CF50E4A-31C5-4E1A-9D1A-D39C325A1C98}"/>
               </a:ext>
             </a:extLst>
           </p:cNvPr>
@@ -1423,7 +1368,7 @@
           <p:cNvPr id="5" name="Accent rule">
             <a:extLst xmlns:a="http://schemas.openxmlformats.org/drawingml/2006/main">
               <a:ext uri="{FF2B5EF4-FFF2-40B4-BE49-F238E27FC236}">
-                <a16:creationId xmlns:a16="http://schemas.microsoft.com/office/drawing/2014/main" id="{C8338740-E645-46EC-A28F-AE2F657BCD82}"/>
+                <a16:creationId xmlns:a16="http://schemas.microsoft.com/office/drawing/2014/main" id="{75E0C540-5DD9-4FDA-8056-8CE916167C4A}"/>
               </a:ext>
             </a:extLst>
           </p:cNvPr>
@@ -1454,7 +1399,7 @@
           <p:cNvPr id="2" name="Title">
             <a:extLst xmlns:a="http://schemas.openxmlformats.org/drawingml/2006/main">
               <a:ext uri="{FF2B5EF4-FFF2-40B4-BE49-F238E27FC236}">
-                <a16:creationId xmlns:a16="http://schemas.microsoft.com/office/drawing/2014/main" id="{655BA0A7-45EA-4E26-83EF-66B6698EDF0B}"/>
+                <a16:creationId xmlns:a16="http://schemas.microsoft.com/office/drawing/2014/main" id="{188D4FA3-8595-420F-88BA-32211883507E}"/>
               </a:ext>
             </a:extLst>
           </p:cNvPr>
@@ -1601,7 +1546,7 @@
           <p:cNvPr id="3" name="Left column">
             <a:extLst xmlns:a="http://schemas.openxmlformats.org/drawingml/2006/main">
               <a:ext uri="{FF2B5EF4-FFF2-40B4-BE49-F238E27FC236}">
-                <a16:creationId xmlns:a16="http://schemas.microsoft.com/office/drawing/2014/main" id="{4F687DB7-0135-4CF4-87F8-4131F5ACD965}"/>
+                <a16:creationId xmlns:a16="http://schemas.microsoft.com/office/drawing/2014/main" id="{403FD204-3617-4960-9A16-CDA36469BD52}"/>
               </a:ext>
             </a:extLst>
           </p:cNvPr>
@@ -1748,7 +1693,7 @@
           <p:cNvPr id="4" name="Right column">
             <a:extLst xmlns:a="http://schemas.openxmlformats.org/drawingml/2006/main">
               <a:ext uri="{FF2B5EF4-FFF2-40B4-BE49-F238E27FC236}">
-                <a16:creationId xmlns:a16="http://schemas.microsoft.com/office/drawing/2014/main" id="{DFED5F7C-DA6B-4EDD-B0C5-A539B900BD14}"/>
+                <a16:creationId xmlns:a16="http://schemas.microsoft.com/office/drawing/2014/main" id="{0AFAF074-6F1D-44C6-8259-566C19384003}"/>
               </a:ext>
             </a:extLst>
           </p:cNvPr>
@@ -1912,7 +1857,7 @@
           <p:cNvPr id="4" name="Accent rule">
             <a:extLst xmlns:a="http://schemas.openxmlformats.org/drawingml/2006/main">
               <a:ext uri="{FF2B5EF4-FFF2-40B4-BE49-F238E27FC236}">
-                <a16:creationId xmlns:a16="http://schemas.microsoft.com/office/drawing/2014/main" id="{5E3254A5-541B-49B8-BA2C-8E0A76BAAFE5}"/>
+                <a16:creationId xmlns:a16="http://schemas.microsoft.com/office/drawing/2014/main" id="{A103B395-D959-4E47-B912-E2FD91DEEA78}"/>
               </a:ext>
             </a:extLst>
           </p:cNvPr>
@@ -1943,7 +1888,7 @@
           <p:cNvPr id="2" name="Title">
             <a:extLst xmlns:a="http://schemas.openxmlformats.org/drawingml/2006/main">
               <a:ext uri="{FF2B5EF4-FFF2-40B4-BE49-F238E27FC236}">
-                <a16:creationId xmlns:a16="http://schemas.microsoft.com/office/drawing/2014/main" id="{40389442-D3B3-49F3-8E27-71A5E863163F}"/>
+                <a16:creationId xmlns:a16="http://schemas.microsoft.com/office/drawing/2014/main" id="{3151E98F-383B-4BEF-B78C-4B46AFD8C26E}"/>
               </a:ext>
             </a:extLst>
           </p:cNvPr>
@@ -2090,7 +2035,7 @@
           <p:cNvPr id="3" name="Left column">
             <a:extLst xmlns:a="http://schemas.openxmlformats.org/drawingml/2006/main">
               <a:ext uri="{FF2B5EF4-FFF2-40B4-BE49-F238E27FC236}">
-                <a16:creationId xmlns:a16="http://schemas.microsoft.com/office/drawing/2014/main" id="{0639A11A-A5F7-40F6-A280-2C6D276886D5}"/>
+                <a16:creationId xmlns:a16="http://schemas.microsoft.com/office/drawing/2014/main" id="{136AABFB-88EE-4427-A7D8-9B0BC8801DAC}"/>
               </a:ext>
             </a:extLst>
           </p:cNvPr>
@@ -2275,12 +2220,12 @@
   </p:cSld>
   <p:clrMap bg1="lt1" tx1="dk1" bg2="lt2" tx2="dk2" accent1="accent1" accent2="accent2" accent3="accent3" accent4="accent4" accent5="accent5" accent6="accent6" hlink="hlink" folHlink="folHlink"/>
   <p:sldLayoutIdLst>
-    <p:sldLayoutId xmlns:r="http://schemas.openxmlformats.org/officeDocument/2006/relationships" id="2147483649" r:id="Re6c6f94acf7b45d1"/>
-    <p:sldLayoutId xmlns:r="http://schemas.openxmlformats.org/officeDocument/2006/relationships" id="2147483650" r:id="Rc636519058184ba1"/>
-    <p:sldLayoutId xmlns:r="http://schemas.openxmlformats.org/officeDocument/2006/relationships" id="2147483651" r:id="Rf4cc0d1c5fe04be6"/>
-    <p:sldLayoutId xmlns:r="http://schemas.openxmlformats.org/officeDocument/2006/relationships" id="2147483652" r:id="Rd407fc4d618b4ecb"/>
-    <p:sldLayoutId xmlns:r="http://schemas.openxmlformats.org/officeDocument/2006/relationships" id="2147483653" r:id="R4af79f5ec1ad4c7e"/>
-    <p:sldLayoutId xmlns:r="http://schemas.openxmlformats.org/officeDocument/2006/relationships" id="2147483654" r:id="Rdd077b4a33d149c1"/>
+    <p:sldLayoutId xmlns:r="http://schemas.openxmlformats.org/officeDocument/2006/relationships" id="2147483649" r:id="Rd5ba0be04f42497e"/>
+    <p:sldLayoutId xmlns:r="http://schemas.openxmlformats.org/officeDocument/2006/relationships" id="2147483650" r:id="R51311013a12647d8"/>
+    <p:sldLayoutId xmlns:r="http://schemas.openxmlformats.org/officeDocument/2006/relationships" id="2147483651" r:id="Reb3676df510f4444"/>
+    <p:sldLayoutId xmlns:r="http://schemas.openxmlformats.org/officeDocument/2006/relationships" id="2147483652" r:id="Rec2c139987a14315"/>
+    <p:sldLayoutId xmlns:r="http://schemas.openxmlformats.org/officeDocument/2006/relationships" id="2147483653" r:id="Rce2ca1b8ebf24137"/>
+    <p:sldLayoutId xmlns:r="http://schemas.openxmlformats.org/officeDocument/2006/relationships" id="2147483654" r:id="Re7211613d5104b07"/>
   </p:sldLayoutIdLst>
   <p:txStyles>
     <p:titleStyle>
@@ -2831,7 +2776,7 @@
           <p:cNvPr id="19" name="">
             <a:extLst xmlns:a="http://schemas.openxmlformats.org/drawingml/2006/main">
               <a:ext uri="{FF2B5EF4-FFF2-40B4-BE49-F238E27FC236}">
-                <a16:creationId xmlns:a16="http://schemas.microsoft.com/office/drawing/2014/main" id="{6F90CEB6-1801-4701-B64E-76F7A1489925}"/>
+                <a16:creationId xmlns:a16="http://schemas.microsoft.com/office/drawing/2014/main" id="{24913C7B-771C-4AA5-8E3C-E5E1C2A52FDE}"/>
               </a:ext>
             </a:extLst>
           </p:cNvPr>
@@ -2888,7 +2833,7 @@
           <p:cNvPr id="2" name="">
             <a:extLst xmlns:a="http://schemas.openxmlformats.org/drawingml/2006/main">
               <a:ext uri="{FF2B5EF4-FFF2-40B4-BE49-F238E27FC236}">
-                <a16:creationId xmlns:a16="http://schemas.microsoft.com/office/drawing/2014/main" id="{8C8A3583-ADD8-4C60-BEB4-009E55E5E42C}"/>
+                <a16:creationId xmlns:a16="http://schemas.microsoft.com/office/drawing/2014/main" id="{8957A7E4-DE4A-48C7-BD3E-062840F032C7}"/>
               </a:ext>
             </a:extLst>
           </p:cNvPr>
@@ -2945,7 +2890,7 @@
           <p:cNvPr id="3" name="">
             <a:extLst xmlns:a="http://schemas.openxmlformats.org/drawingml/2006/main">
               <a:ext uri="{FF2B5EF4-FFF2-40B4-BE49-F238E27FC236}">
-                <a16:creationId xmlns:a16="http://schemas.microsoft.com/office/drawing/2014/main" id="{972D1251-EB64-4A2E-B3C1-DC36C39438C5}"/>
+                <a16:creationId xmlns:a16="http://schemas.microsoft.com/office/drawing/2014/main" id="{CD6E273A-36E9-46E4-BCDB-7EC5A8366760}"/>
               </a:ext>
             </a:extLst>
           </p:cNvPr>
@@ -2975,7 +2920,7 @@
           <p:cNvPr id="4" name="">
             <a:extLst xmlns:a="http://schemas.openxmlformats.org/drawingml/2006/main">
               <a:ext uri="{FF2B5EF4-FFF2-40B4-BE49-F238E27FC236}">
-                <a16:creationId xmlns:a16="http://schemas.microsoft.com/office/drawing/2014/main" id="{8289D6B3-A6AF-48C1-AA91-FF51B1E9B1AE}"/>
+                <a16:creationId xmlns:a16="http://schemas.microsoft.com/office/drawing/2014/main" id="{A4852DF8-DB1F-4A8A-A43C-EF9A18BEC481}"/>
               </a:ext>
             </a:extLst>
           </p:cNvPr>
@@ -3032,7 +2977,7 @@
           <p:cNvPr id="5" name="">
             <a:extLst xmlns:a="http://schemas.openxmlformats.org/drawingml/2006/main">
               <a:ext uri="{FF2B5EF4-FFF2-40B4-BE49-F238E27FC236}">
-                <a16:creationId xmlns:a16="http://schemas.microsoft.com/office/drawing/2014/main" id="{BD218356-CBEB-46B3-8FAB-18151BC59CDD}"/>
+                <a16:creationId xmlns:a16="http://schemas.microsoft.com/office/drawing/2014/main" id="{939C4FAE-12B2-430D-9B6D-AC5D9BF62670}"/>
               </a:ext>
             </a:extLst>
           </p:cNvPr>
@@ -3089,7 +3034,7 @@
           <p:cNvPr id="6" name="">
             <a:extLst xmlns:a="http://schemas.openxmlformats.org/drawingml/2006/main">
               <a:ext uri="{FF2B5EF4-FFF2-40B4-BE49-F238E27FC236}">
-                <a16:creationId xmlns:a16="http://schemas.microsoft.com/office/drawing/2014/main" id="{71B07203-11C5-47A5-8BC1-8FA19AA887CF}"/>
+                <a16:creationId xmlns:a16="http://schemas.microsoft.com/office/drawing/2014/main" id="{40F85342-7892-4E57-8E74-454BB9DD0D74}"/>
               </a:ext>
             </a:extLst>
           </p:cNvPr>
@@ -3121,7 +3066,7 @@
           <p:cNvPr id="7" name="">
             <a:extLst xmlns:a="http://schemas.openxmlformats.org/drawingml/2006/main">
               <a:ext uri="{FF2B5EF4-FFF2-40B4-BE49-F238E27FC236}">
-                <a16:creationId xmlns:a16="http://schemas.microsoft.com/office/drawing/2014/main" id="{942E21DA-5AD3-479C-9CB7-47257349A1B0}"/>
+                <a16:creationId xmlns:a16="http://schemas.microsoft.com/office/drawing/2014/main" id="{B39A763F-DCA4-4C7C-8B59-A260423EB4B5}"/>
               </a:ext>
             </a:extLst>
           </p:cNvPr>
@@ -3151,7 +3096,7 @@
           <p:cNvPr id="8" name="">
             <a:extLst xmlns:a="http://schemas.openxmlformats.org/drawingml/2006/main">
               <a:ext uri="{FF2B5EF4-FFF2-40B4-BE49-F238E27FC236}">
-                <a16:creationId xmlns:a16="http://schemas.microsoft.com/office/drawing/2014/main" id="{E7CC01EF-B202-48B7-B386-BF7324AB5EC9}"/>
+                <a16:creationId xmlns:a16="http://schemas.microsoft.com/office/drawing/2014/main" id="{D93D75C5-BAE4-49C8-B7AD-C50905F52890}"/>
               </a:ext>
             </a:extLst>
           </p:cNvPr>
@@ -3208,7 +3153,7 @@
           <p:cNvPr id="9" name="">
             <a:extLst xmlns:a="http://schemas.openxmlformats.org/drawingml/2006/main">
               <a:ext uri="{FF2B5EF4-FFF2-40B4-BE49-F238E27FC236}">
-                <a16:creationId xmlns:a16="http://schemas.microsoft.com/office/drawing/2014/main" id="{19F07B58-1D31-4817-B6CF-92720F053A29}"/>
+                <a16:creationId xmlns:a16="http://schemas.microsoft.com/office/drawing/2014/main" id="{52DE86F9-F86A-4001-9F5E-5F20D796B7C7}"/>
               </a:ext>
             </a:extLst>
           </p:cNvPr>
@@ -3265,7 +3210,7 @@
           <p:cNvPr id="10" name="">
             <a:extLst xmlns:a="http://schemas.openxmlformats.org/drawingml/2006/main">
               <a:ext uri="{FF2B5EF4-FFF2-40B4-BE49-F238E27FC236}">
-                <a16:creationId xmlns:a16="http://schemas.microsoft.com/office/drawing/2014/main" id="{E88C6AFA-BB03-41AE-BEC9-E178E8855AA5}"/>
+                <a16:creationId xmlns:a16="http://schemas.microsoft.com/office/drawing/2014/main" id="{211218FE-D3E3-4A5A-B7E2-A7B41BFEFC21}"/>
               </a:ext>
             </a:extLst>
           </p:cNvPr>
@@ -3322,7 +3267,7 @@
           <p:cNvPr id="11" name="">
             <a:extLst xmlns:a="http://schemas.openxmlformats.org/drawingml/2006/main">
               <a:ext uri="{FF2B5EF4-FFF2-40B4-BE49-F238E27FC236}">
-                <a16:creationId xmlns:a16="http://schemas.microsoft.com/office/drawing/2014/main" id="{914EBEAE-EEC5-4604-BF0B-12972A816894}"/>
+                <a16:creationId xmlns:a16="http://schemas.microsoft.com/office/drawing/2014/main" id="{DE63DEC5-B748-4675-90AE-332A195B03FF}"/>
               </a:ext>
             </a:extLst>
           </p:cNvPr>
@@ -3354,7 +3299,7 @@
           <p:cNvPr id="12" name="">
             <a:extLst xmlns:a="http://schemas.openxmlformats.org/drawingml/2006/main">
               <a:ext uri="{FF2B5EF4-FFF2-40B4-BE49-F238E27FC236}">
-                <a16:creationId xmlns:a16="http://schemas.microsoft.com/office/drawing/2014/main" id="{13377ABA-D40F-4EB0-9527-7EDC2CB4263F}"/>
+                <a16:creationId xmlns:a16="http://schemas.microsoft.com/office/drawing/2014/main" id="{8B2D3F54-2FB2-42A3-9AD5-9C7221BAB97D}"/>
               </a:ext>
             </a:extLst>
           </p:cNvPr>
@@ -3384,7 +3329,7 @@
           <p:cNvPr id="13" name="">
             <a:extLst xmlns:a="http://schemas.openxmlformats.org/drawingml/2006/main">
               <a:ext uri="{FF2B5EF4-FFF2-40B4-BE49-F238E27FC236}">
-                <a16:creationId xmlns:a16="http://schemas.microsoft.com/office/drawing/2014/main" id="{45E6810B-5A82-4B77-885F-8AD07570F222}"/>
+                <a16:creationId xmlns:a16="http://schemas.microsoft.com/office/drawing/2014/main" id="{A7982DDF-196C-41DA-BD13-56172E31F688}"/>
               </a:ext>
             </a:extLst>
           </p:cNvPr>
@@ -3441,7 +3386,7 @@
           <p:cNvPr id="14" name="">
             <a:extLst xmlns:a="http://schemas.openxmlformats.org/drawingml/2006/main">
               <a:ext uri="{FF2B5EF4-FFF2-40B4-BE49-F238E27FC236}">
-                <a16:creationId xmlns:a16="http://schemas.microsoft.com/office/drawing/2014/main" id="{5648A33D-3826-44A7-A2C1-98E06C5EFE3A}"/>
+                <a16:creationId xmlns:a16="http://schemas.microsoft.com/office/drawing/2014/main" id="{6501AEFF-D710-4333-847D-D9B553A1C52F}"/>
               </a:ext>
             </a:extLst>
           </p:cNvPr>
@@ -3498,7 +3443,7 @@
           <p:cNvPr id="15" name="">
             <a:extLst xmlns:a="http://schemas.openxmlformats.org/drawingml/2006/main">
               <a:ext uri="{FF2B5EF4-FFF2-40B4-BE49-F238E27FC236}">
-                <a16:creationId xmlns:a16="http://schemas.microsoft.com/office/drawing/2014/main" id="{2A136234-71C7-41C8-9400-3A184B0B49CE}"/>
+                <a16:creationId xmlns:a16="http://schemas.microsoft.com/office/drawing/2014/main" id="{99E0F913-9F2A-4CA7-93CF-3321DA01C425}"/>
               </a:ext>
             </a:extLst>
           </p:cNvPr>
@@ -3555,7 +3500,7 @@
           <p:cNvPr id="16" name="">
             <a:extLst xmlns:a="http://schemas.openxmlformats.org/drawingml/2006/main">
               <a:ext uri="{FF2B5EF4-FFF2-40B4-BE49-F238E27FC236}">
-                <a16:creationId xmlns:a16="http://schemas.microsoft.com/office/drawing/2014/main" id="{7BCA4CE0-BBA1-4FF7-B186-1CB8DEC9AD83}"/>
+                <a16:creationId xmlns:a16="http://schemas.microsoft.com/office/drawing/2014/main" id="{1610CEDF-CA79-4E33-8BFA-DC5C73E74AE9}"/>
               </a:ext>
             </a:extLst>
           </p:cNvPr>
@@ -3585,7 +3530,7 @@
           <p:cNvPr id="17" name="">
             <a:extLst xmlns:a="http://schemas.openxmlformats.org/drawingml/2006/main">
               <a:ext uri="{FF2B5EF4-FFF2-40B4-BE49-F238E27FC236}">
-                <a16:creationId xmlns:a16="http://schemas.microsoft.com/office/drawing/2014/main" id="{0BF3DE26-5D97-4020-80AE-9BBFA02E7CDD}"/>
+                <a16:creationId xmlns:a16="http://schemas.microsoft.com/office/drawing/2014/main" id="{970E003F-FAB5-4C49-9B7E-1DE3172FE700}"/>
               </a:ext>
             </a:extLst>
           </p:cNvPr>
@@ -3642,7 +3587,7 @@
           <p:cNvPr id="18" name="">
             <a:extLst xmlns:a="http://schemas.openxmlformats.org/drawingml/2006/main">
               <a:ext uri="{FF2B5EF4-FFF2-40B4-BE49-F238E27FC236}">
-                <a16:creationId xmlns:a16="http://schemas.microsoft.com/office/drawing/2014/main" id="{966B5F8D-E0AF-436D-98DE-610405666EF2}"/>
+                <a16:creationId xmlns:a16="http://schemas.microsoft.com/office/drawing/2014/main" id="{7F4FD12D-DC4A-45BC-A2D8-43DF0608DB87}"/>
               </a:ext>
             </a:extLst>
           </p:cNvPr>
@@ -3697,7 +3642,7 @@
     </p:spTree>
     <p:extLst>
       <p:ext uri="{BB962C8B-B14F-4D97-AF65-F5344CB8AC3E}">
-        <p14:creationId xmlns:p14="http://schemas.microsoft.com/office/powerpoint/2010/main" val="1157739510"/>
+        <p14:creationId xmlns:p14="http://schemas.microsoft.com/office/powerpoint/2010/main" val="1391708206"/>
       </p:ext>
     </p:extLst>
   </p:cSld>

--- a/retrieval-picture-prompts-template.pptx
+++ b/retrieval-picture-prompts-template.pptx
@@ -2,13 +2,13 @@
 <file path=ppt/presentation.xml><?xml version="1.0" encoding="utf-8"?>
 <p:presentation xmlns:p="http://schemas.openxmlformats.org/presentationml/2006/main">
   <p:sldMasterIdLst>
-    <p:sldMasterId xmlns:r="http://schemas.openxmlformats.org/officeDocument/2006/relationships" id="2147483648" r:id="R23ec919c67b4485f"/>
+    <p:sldMasterId xmlns:r="http://schemas.openxmlformats.org/officeDocument/2006/relationships" id="2147483648" r:id="R9b249a58287244e7"/>
   </p:sldMasterIdLst>
   <p:notesMasterIdLst>
-    <p:notesMasterId xmlns:r="http://schemas.openxmlformats.org/officeDocument/2006/relationships" r:id="R3738576ba20f4446"/>
+    <p:notesMasterId xmlns:r="http://schemas.openxmlformats.org/officeDocument/2006/relationships" r:id="R712c835e750d4df1"/>
   </p:notesMasterIdLst>
   <p:sldIdLst>
-    <p:sldId xmlns:r="http://schemas.openxmlformats.org/officeDocument/2006/relationships" id="256" r:id="Rf5178f784a2b4a47"/>
+    <p:sldId xmlns:r="http://schemas.openxmlformats.org/officeDocument/2006/relationships" id="256" r:id="R7f78f58ea6c44fe0"/>
   </p:sldIdLst>
   <p:sldSz cx="12192000" cy="6858000"/>
   <p:notesSz cx="6858000" cy="9144000"/>
@@ -445,6 +445,66 @@
               <a:t>Replace bracketed text with your own taught prompts and checked answers. All labels and response areas are editable. Give everyone an independent attempt before revealing answers. Duplicate the slide for answers or another prompt. For cards, print the prompt and answer on opposite sides or fold them to keep answers hidden.</a:t>
             </a:r>
           </a:p>
+          <a:p xmlns:a="http://schemas.openxmlformats.org/drawingml/2006/main">
+            <a:r>
+              <a:t/>
+            </a:r>
+          </a:p>
+          <a:p xmlns:a="http://schemas.openxmlformats.org/drawingml/2006/main">
+            <a:r>
+              <a:t>SOURCE AND ACKNOWLEDGEMENT</a:t>
+            </a:r>
+          </a:p>
+          <a:p xmlns:a="http://schemas.openxmlformats.org/drawingml/2006/main">
+            <a:r>
+              <a:t/>
+            </a:r>
+          </a:p>
+          <a:p xmlns:a="http://schemas.openxmlformats.org/drawingml/2006/main">
+            <a:r>
+              <a:t>Shared visual-cue method; TNT classroom adaptation</a:t>
+            </a:r>
+          </a:p>
+          <a:p xmlns:a="http://schemas.openxmlformats.org/drawingml/2006/main">
+            <a:r>
+              <a:t/>
+            </a:r>
+          </a:p>
+          <a:p xmlns:a="http://schemas.openxmlformats.org/drawingml/2006/main">
+            <a:r>
+              <a:t>https://pdf.retrievalpractice.org/RetrievalPracticeGuide.pdf</a:t>
+            </a:r>
+          </a:p>
+          <a:p xmlns:a="http://schemas.openxmlformats.org/drawingml/2006/main">
+            <a:r>
+              <a:t/>
+            </a:r>
+          </a:p>
+          <a:p xmlns:a="http://schemas.openxmlformats.org/drawingml/2006/main">
+            <a:r>
+              <a:t>No single originator is verified for this broad routine. The link supports retrieval principles rather than establishing ownership of picture prompts.</a:t>
+            </a:r>
+          </a:p>
+          <a:p xmlns:a="http://schemas.openxmlformats.org/drawingml/2006/main">
+            <a:r>
+              <a:t/>
+            </a:r>
+          </a:p>
+          <a:p xmlns:a="http://schemas.openxmlformats.org/drawingml/2006/main">
+            <a:r>
+              <a:t>Independent classroom adaptation; the source retains its own rights.</a:t>
+            </a:r>
+          </a:p>
+          <a:p xmlns:a="http://schemas.openxmlformats.org/drawingml/2006/main">
+            <a:r>
+              <a:t/>
+            </a:r>
+          </a:p>
+          <a:p xmlns:a="http://schemas.openxmlformats.org/drawingml/2006/main">
+            <a:r>
+              <a:t>Full guide: https://tnt-teaching-tools.github.io/retrieval-toolkit/retrieval-picture-prompts.html</a:t>
+            </a:r>
+          </a:p>
         </p:txBody>
       </p:sp>
       <p:sp>
@@ -489,7 +549,7 @@
           <p:cNvPr id="4" name="Accent rule">
             <a:extLst xmlns:a="http://schemas.openxmlformats.org/drawingml/2006/main">
               <a:ext uri="{FF2B5EF4-FFF2-40B4-BE49-F238E27FC236}">
-                <a16:creationId xmlns:a16="http://schemas.microsoft.com/office/drawing/2014/main" id="{5AD3A25A-E935-4598-AA73-D9002DEF05B6}"/>
+                <a16:creationId xmlns:a16="http://schemas.microsoft.com/office/drawing/2014/main" id="{27242F87-905B-4F2B-BE1F-936977E455DD}"/>
               </a:ext>
             </a:extLst>
           </p:cNvPr>
@@ -520,7 +580,7 @@
           <p:cNvPr id="2" name="Title">
             <a:extLst xmlns:a="http://schemas.openxmlformats.org/drawingml/2006/main">
               <a:ext uri="{FF2B5EF4-FFF2-40B4-BE49-F238E27FC236}">
-                <a16:creationId xmlns:a16="http://schemas.microsoft.com/office/drawing/2014/main" id="{7B415B97-DA75-4F9A-875D-1766B3314CA3}"/>
+                <a16:creationId xmlns:a16="http://schemas.microsoft.com/office/drawing/2014/main" id="{4BD98E97-4E52-434B-A381-A4273309CA01}"/>
               </a:ext>
             </a:extLst>
           </p:cNvPr>
@@ -561,6 +621,7 @@
                 <a:spcPts val="0"/>
               </a:spcAft>
               <a:buNone/>
+              <a:defRPr/>
             </a:lvl1pPr>
             <a:lvl2pPr marL="0" indent="0">
               <a:lnSpc>
@@ -573,6 +634,7 @@
                 <a:spcPts val="0"/>
               </a:spcAft>
               <a:buNone/>
+              <a:defRPr/>
             </a:lvl2pPr>
             <a:lvl3pPr marL="0" indent="0">
               <a:lnSpc>
@@ -585,6 +647,7 @@
                 <a:spcPts val="0"/>
               </a:spcAft>
               <a:buNone/>
+              <a:defRPr/>
             </a:lvl3pPr>
             <a:lvl4pPr marL="0" indent="0">
               <a:lnSpc>
@@ -597,6 +660,7 @@
                 <a:spcPts val="0"/>
               </a:spcAft>
               <a:buNone/>
+              <a:defRPr/>
             </a:lvl4pPr>
             <a:lvl5pPr marL="0" indent="0">
               <a:lnSpc>
@@ -609,6 +673,7 @@
                 <a:spcPts val="0"/>
               </a:spcAft>
               <a:buNone/>
+              <a:defRPr/>
             </a:lvl5pPr>
             <a:lvl6pPr marL="0" indent="0">
               <a:lnSpc>
@@ -621,6 +686,7 @@
                 <a:spcPts val="0"/>
               </a:spcAft>
               <a:buNone/>
+              <a:defRPr/>
             </a:lvl6pPr>
             <a:lvl7pPr marL="0" indent="0">
               <a:lnSpc>
@@ -633,6 +699,7 @@
                 <a:spcPts val="0"/>
               </a:spcAft>
               <a:buNone/>
+              <a:defRPr/>
             </a:lvl7pPr>
             <a:lvl8pPr marL="0" indent="0">
               <a:lnSpc>
@@ -645,6 +712,7 @@
                 <a:spcPts val="0"/>
               </a:spcAft>
               <a:buNone/>
+              <a:defRPr/>
             </a:lvl8pPr>
             <a:lvl9pPr marL="0" indent="0">
               <a:lnSpc>
@@ -657,6 +725,7 @@
                 <a:spcPts val="0"/>
               </a:spcAft>
               <a:buNone/>
+              <a:defRPr/>
             </a:lvl9pPr>
           </a:lstStyle>
           <a:p xmlns:a="http://schemas.openxmlformats.org/drawingml/2006/main"/>
@@ -667,7 +736,7 @@
           <p:cNvPr id="3" name="Subtitle">
             <a:extLst xmlns:a="http://schemas.openxmlformats.org/drawingml/2006/main">
               <a:ext uri="{FF2B5EF4-FFF2-40B4-BE49-F238E27FC236}">
-                <a16:creationId xmlns:a16="http://schemas.microsoft.com/office/drawing/2014/main" id="{9B59FA2C-7A2F-4618-8C88-6ED57BD59327}"/>
+                <a16:creationId xmlns:a16="http://schemas.microsoft.com/office/drawing/2014/main" id="{5E35D7FD-72FE-468E-89F4-FA07C55A5493}"/>
               </a:ext>
             </a:extLst>
           </p:cNvPr>
@@ -708,6 +777,7 @@
                 <a:spcPts val="0"/>
               </a:spcAft>
               <a:buNone/>
+              <a:defRPr/>
             </a:lvl1pPr>
             <a:lvl2pPr marL="0" indent="0">
               <a:lnSpc>
@@ -720,6 +790,7 @@
                 <a:spcPts val="0"/>
               </a:spcAft>
               <a:buNone/>
+              <a:defRPr/>
             </a:lvl2pPr>
             <a:lvl3pPr marL="0" indent="0">
               <a:lnSpc>
@@ -732,6 +803,7 @@
                 <a:spcPts val="0"/>
               </a:spcAft>
               <a:buNone/>
+              <a:defRPr/>
             </a:lvl3pPr>
             <a:lvl4pPr marL="0" indent="0">
               <a:lnSpc>
@@ -744,6 +816,7 @@
                 <a:spcPts val="0"/>
               </a:spcAft>
               <a:buNone/>
+              <a:defRPr/>
             </a:lvl4pPr>
             <a:lvl5pPr marL="0" indent="0">
               <a:lnSpc>
@@ -756,6 +829,7 @@
                 <a:spcPts val="0"/>
               </a:spcAft>
               <a:buNone/>
+              <a:defRPr/>
             </a:lvl5pPr>
             <a:lvl6pPr marL="0" indent="0">
               <a:lnSpc>
@@ -768,6 +842,7 @@
                 <a:spcPts val="0"/>
               </a:spcAft>
               <a:buNone/>
+              <a:defRPr/>
             </a:lvl6pPr>
             <a:lvl7pPr marL="0" indent="0">
               <a:lnSpc>
@@ -780,6 +855,7 @@
                 <a:spcPts val="0"/>
               </a:spcAft>
               <a:buNone/>
+              <a:defRPr/>
             </a:lvl7pPr>
             <a:lvl8pPr marL="0" indent="0">
               <a:lnSpc>
@@ -792,6 +868,7 @@
                 <a:spcPts val="0"/>
               </a:spcAft>
               <a:buNone/>
+              <a:defRPr/>
             </a:lvl8pPr>
             <a:lvl9pPr marL="0" indent="0">
               <a:lnSpc>
@@ -804,6 +881,7 @@
                 <a:spcPts val="0"/>
               </a:spcAft>
               <a:buNone/>
+              <a:defRPr/>
             </a:lvl9pPr>
           </a:lstStyle>
           <a:p xmlns:a="http://schemas.openxmlformats.org/drawingml/2006/main"/>
@@ -831,7 +909,7 @@
           <p:cNvPr id="3" name="Accent rule">
             <a:extLst xmlns:a="http://schemas.openxmlformats.org/drawingml/2006/main">
               <a:ext uri="{FF2B5EF4-FFF2-40B4-BE49-F238E27FC236}">
-                <a16:creationId xmlns:a16="http://schemas.microsoft.com/office/drawing/2014/main" id="{6BC61FA3-92B4-446E-A0DC-E4C6AA6D3958}"/>
+                <a16:creationId xmlns:a16="http://schemas.microsoft.com/office/drawing/2014/main" id="{A1F5EC98-B332-4C60-AC92-4C0893B743E9}"/>
               </a:ext>
             </a:extLst>
           </p:cNvPr>
@@ -862,7 +940,7 @@
           <p:cNvPr id="2" name="Section title">
             <a:extLst xmlns:a="http://schemas.openxmlformats.org/drawingml/2006/main">
               <a:ext uri="{FF2B5EF4-FFF2-40B4-BE49-F238E27FC236}">
-                <a16:creationId xmlns:a16="http://schemas.microsoft.com/office/drawing/2014/main" id="{589FB87B-599D-4B9D-88FE-91018C640452}"/>
+                <a16:creationId xmlns:a16="http://schemas.microsoft.com/office/drawing/2014/main" id="{34E22616-78E8-428B-8FFD-BD12554E48CB}"/>
               </a:ext>
             </a:extLst>
           </p:cNvPr>
@@ -903,6 +981,7 @@
                 <a:spcPts val="0"/>
               </a:spcAft>
               <a:buNone/>
+              <a:defRPr/>
             </a:lvl1pPr>
             <a:lvl2pPr marL="0" indent="0">
               <a:lnSpc>
@@ -915,6 +994,7 @@
                 <a:spcPts val="0"/>
               </a:spcAft>
               <a:buNone/>
+              <a:defRPr/>
             </a:lvl2pPr>
             <a:lvl3pPr marL="0" indent="0">
               <a:lnSpc>
@@ -927,6 +1007,7 @@
                 <a:spcPts val="0"/>
               </a:spcAft>
               <a:buNone/>
+              <a:defRPr/>
             </a:lvl3pPr>
             <a:lvl4pPr marL="0" indent="0">
               <a:lnSpc>
@@ -939,6 +1020,7 @@
                 <a:spcPts val="0"/>
               </a:spcAft>
               <a:buNone/>
+              <a:defRPr/>
             </a:lvl4pPr>
             <a:lvl5pPr marL="0" indent="0">
               <a:lnSpc>
@@ -951,6 +1033,7 @@
                 <a:spcPts val="0"/>
               </a:spcAft>
               <a:buNone/>
+              <a:defRPr/>
             </a:lvl5pPr>
             <a:lvl6pPr marL="0" indent="0">
               <a:lnSpc>
@@ -963,6 +1046,7 @@
                 <a:spcPts val="0"/>
               </a:spcAft>
               <a:buNone/>
+              <a:defRPr/>
             </a:lvl6pPr>
             <a:lvl7pPr marL="0" indent="0">
               <a:lnSpc>
@@ -975,6 +1059,7 @@
                 <a:spcPts val="0"/>
               </a:spcAft>
               <a:buNone/>
+              <a:defRPr/>
             </a:lvl7pPr>
             <a:lvl8pPr marL="0" indent="0">
               <a:lnSpc>
@@ -987,6 +1072,7 @@
                 <a:spcPts val="0"/>
               </a:spcAft>
               <a:buNone/>
+              <a:defRPr/>
             </a:lvl8pPr>
             <a:lvl9pPr marL="0" indent="0">
               <a:lnSpc>
@@ -999,6 +1085,7 @@
                 <a:spcPts val="0"/>
               </a:spcAft>
               <a:buNone/>
+              <a:defRPr/>
             </a:lvl9pPr>
           </a:lstStyle>
           <a:p xmlns:a="http://schemas.openxmlformats.org/drawingml/2006/main"/>
@@ -1026,7 +1113,7 @@
           <p:cNvPr id="4" name="Accent rule">
             <a:extLst xmlns:a="http://schemas.openxmlformats.org/drawingml/2006/main">
               <a:ext uri="{FF2B5EF4-FFF2-40B4-BE49-F238E27FC236}">
-                <a16:creationId xmlns:a16="http://schemas.microsoft.com/office/drawing/2014/main" id="{9771C671-A706-4F47-89BC-6092FBBFA25B}"/>
+                <a16:creationId xmlns:a16="http://schemas.microsoft.com/office/drawing/2014/main" id="{D3B05B45-CA06-4DD7-9837-B653E16E4A33}"/>
               </a:ext>
             </a:extLst>
           </p:cNvPr>
@@ -1057,7 +1144,7 @@
           <p:cNvPr id="2" name="Title">
             <a:extLst xmlns:a="http://schemas.openxmlformats.org/drawingml/2006/main">
               <a:ext uri="{FF2B5EF4-FFF2-40B4-BE49-F238E27FC236}">
-                <a16:creationId xmlns:a16="http://schemas.microsoft.com/office/drawing/2014/main" id="{5E4D1244-B7DC-408A-8049-6CBA53308E86}"/>
+                <a16:creationId xmlns:a16="http://schemas.microsoft.com/office/drawing/2014/main" id="{51483976-C61E-4EEF-B502-520E2337A3E2}"/>
               </a:ext>
             </a:extLst>
           </p:cNvPr>
@@ -1098,6 +1185,7 @@
                 <a:spcPts val="0"/>
               </a:spcAft>
               <a:buNone/>
+              <a:defRPr/>
             </a:lvl1pPr>
             <a:lvl2pPr marL="0" indent="0">
               <a:lnSpc>
@@ -1110,6 +1198,7 @@
                 <a:spcPts val="0"/>
               </a:spcAft>
               <a:buNone/>
+              <a:defRPr/>
             </a:lvl2pPr>
             <a:lvl3pPr marL="0" indent="0">
               <a:lnSpc>
@@ -1122,6 +1211,7 @@
                 <a:spcPts val="0"/>
               </a:spcAft>
               <a:buNone/>
+              <a:defRPr/>
             </a:lvl3pPr>
             <a:lvl4pPr marL="0" indent="0">
               <a:lnSpc>
@@ -1134,6 +1224,7 @@
                 <a:spcPts val="0"/>
               </a:spcAft>
               <a:buNone/>
+              <a:defRPr/>
             </a:lvl4pPr>
             <a:lvl5pPr marL="0" indent="0">
               <a:lnSpc>
@@ -1146,6 +1237,7 @@
                 <a:spcPts val="0"/>
               </a:spcAft>
               <a:buNone/>
+              <a:defRPr/>
             </a:lvl5pPr>
             <a:lvl6pPr marL="0" indent="0">
               <a:lnSpc>
@@ -1158,6 +1250,7 @@
                 <a:spcPts val="0"/>
               </a:spcAft>
               <a:buNone/>
+              <a:defRPr/>
             </a:lvl6pPr>
             <a:lvl7pPr marL="0" indent="0">
               <a:lnSpc>
@@ -1170,6 +1263,7 @@
                 <a:spcPts val="0"/>
               </a:spcAft>
               <a:buNone/>
+              <a:defRPr/>
             </a:lvl7pPr>
             <a:lvl8pPr marL="0" indent="0">
               <a:lnSpc>
@@ -1182,6 +1276,7 @@
                 <a:spcPts val="0"/>
               </a:spcAft>
               <a:buNone/>
+              <a:defRPr/>
             </a:lvl8pPr>
             <a:lvl9pPr marL="0" indent="0">
               <a:lnSpc>
@@ -1194,6 +1289,7 @@
                 <a:spcPts val="0"/>
               </a:spcAft>
               <a:buNone/>
+              <a:defRPr/>
             </a:lvl9pPr>
           </a:lstStyle>
           <a:p xmlns:a="http://schemas.openxmlformats.org/drawingml/2006/main"/>
@@ -1204,7 +1300,7 @@
           <p:cNvPr id="3" name="Body">
             <a:extLst xmlns:a="http://schemas.openxmlformats.org/drawingml/2006/main">
               <a:ext uri="{FF2B5EF4-FFF2-40B4-BE49-F238E27FC236}">
-                <a16:creationId xmlns:a16="http://schemas.microsoft.com/office/drawing/2014/main" id="{9CF50E4A-31C5-4E1A-9D1A-D39C325A1C98}"/>
+                <a16:creationId xmlns:a16="http://schemas.microsoft.com/office/drawing/2014/main" id="{C8FE5B40-0980-406D-81A3-94B82038F53D}"/>
               </a:ext>
             </a:extLst>
           </p:cNvPr>
@@ -1245,6 +1341,7 @@
                 <a:spcPts val="1200"/>
               </a:spcAft>
               <a:buChar char="•"/>
+              <a:defRPr/>
             </a:lvl1pPr>
             <a:lvl2pPr marL="533400" indent="-228600">
               <a:lnSpc>
@@ -1257,6 +1354,7 @@
                 <a:spcPts val="1200"/>
               </a:spcAft>
               <a:buChar char="•"/>
+              <a:defRPr/>
             </a:lvl2pPr>
             <a:lvl3pPr marL="838200" indent="-228600">
               <a:lnSpc>
@@ -1269,6 +1367,7 @@
                 <a:spcPts val="1200"/>
               </a:spcAft>
               <a:buChar char="•"/>
+              <a:defRPr/>
             </a:lvl3pPr>
             <a:lvl4pPr marL="1143000" indent="-228600">
               <a:lnSpc>
@@ -1281,6 +1380,7 @@
                 <a:spcPts val="1200"/>
               </a:spcAft>
               <a:buChar char="•"/>
+              <a:defRPr/>
             </a:lvl4pPr>
             <a:lvl5pPr marL="1447800" indent="-228600">
               <a:lnSpc>
@@ -1293,6 +1393,7 @@
                 <a:spcPts val="1200"/>
               </a:spcAft>
               <a:buChar char="•"/>
+              <a:defRPr/>
             </a:lvl5pPr>
             <a:lvl6pPr marL="1752600" indent="-228600">
               <a:lnSpc>
@@ -1305,6 +1406,7 @@
                 <a:spcPts val="1200"/>
               </a:spcAft>
               <a:buChar char="•"/>
+              <a:defRPr/>
             </a:lvl6pPr>
             <a:lvl7pPr marL="2057400" indent="-228600">
               <a:lnSpc>
@@ -1317,6 +1419,7 @@
                 <a:spcPts val="1200"/>
               </a:spcAft>
               <a:buChar char="•"/>
+              <a:defRPr/>
             </a:lvl7pPr>
             <a:lvl8pPr marL="2362200" indent="-228600">
               <a:lnSpc>
@@ -1329,6 +1432,7 @@
                 <a:spcPts val="1200"/>
               </a:spcAft>
               <a:buChar char="•"/>
+              <a:defRPr/>
             </a:lvl8pPr>
             <a:lvl9pPr marL="2667000" indent="-228600">
               <a:lnSpc>
@@ -1341,6 +1445,7 @@
                 <a:spcPts val="1200"/>
               </a:spcAft>
               <a:buChar char="•"/>
+              <a:defRPr/>
             </a:lvl9pPr>
           </a:lstStyle>
           <a:p xmlns:a="http://schemas.openxmlformats.org/drawingml/2006/main"/>
@@ -1368,7 +1473,7 @@
           <p:cNvPr id="5" name="Accent rule">
             <a:extLst xmlns:a="http://schemas.openxmlformats.org/drawingml/2006/main">
               <a:ext uri="{FF2B5EF4-FFF2-40B4-BE49-F238E27FC236}">
-                <a16:creationId xmlns:a16="http://schemas.microsoft.com/office/drawing/2014/main" id="{75E0C540-5DD9-4FDA-8056-8CE916167C4A}"/>
+                <a16:creationId xmlns:a16="http://schemas.microsoft.com/office/drawing/2014/main" id="{534DB576-6DD9-4643-9F19-1ECA6198119B}"/>
               </a:ext>
             </a:extLst>
           </p:cNvPr>
@@ -1399,7 +1504,7 @@
           <p:cNvPr id="2" name="Title">
             <a:extLst xmlns:a="http://schemas.openxmlformats.org/drawingml/2006/main">
               <a:ext uri="{FF2B5EF4-FFF2-40B4-BE49-F238E27FC236}">
-                <a16:creationId xmlns:a16="http://schemas.microsoft.com/office/drawing/2014/main" id="{188D4FA3-8595-420F-88BA-32211883507E}"/>
+                <a16:creationId xmlns:a16="http://schemas.microsoft.com/office/drawing/2014/main" id="{8381C995-7CFE-47E1-90C9-D2BFAC9DC3EB}"/>
               </a:ext>
             </a:extLst>
           </p:cNvPr>
@@ -1440,6 +1545,7 @@
                 <a:spcPts val="0"/>
               </a:spcAft>
               <a:buNone/>
+              <a:defRPr/>
             </a:lvl1pPr>
             <a:lvl2pPr marL="0" indent="0">
               <a:lnSpc>
@@ -1452,6 +1558,7 @@
                 <a:spcPts val="0"/>
               </a:spcAft>
               <a:buNone/>
+              <a:defRPr/>
             </a:lvl2pPr>
             <a:lvl3pPr marL="0" indent="0">
               <a:lnSpc>
@@ -1464,6 +1571,7 @@
                 <a:spcPts val="0"/>
               </a:spcAft>
               <a:buNone/>
+              <a:defRPr/>
             </a:lvl3pPr>
             <a:lvl4pPr marL="0" indent="0">
               <a:lnSpc>
@@ -1476,6 +1584,7 @@
                 <a:spcPts val="0"/>
               </a:spcAft>
               <a:buNone/>
+              <a:defRPr/>
             </a:lvl4pPr>
             <a:lvl5pPr marL="0" indent="0">
               <a:lnSpc>
@@ -1488,6 +1597,7 @@
                 <a:spcPts val="0"/>
               </a:spcAft>
               <a:buNone/>
+              <a:defRPr/>
             </a:lvl5pPr>
             <a:lvl6pPr marL="0" indent="0">
               <a:lnSpc>
@@ -1500,6 +1610,7 @@
                 <a:spcPts val="0"/>
               </a:spcAft>
               <a:buNone/>
+              <a:defRPr/>
             </a:lvl6pPr>
             <a:lvl7pPr marL="0" indent="0">
               <a:lnSpc>
@@ -1512,6 +1623,7 @@
                 <a:spcPts val="0"/>
               </a:spcAft>
               <a:buNone/>
+              <a:defRPr/>
             </a:lvl7pPr>
             <a:lvl8pPr marL="0" indent="0">
               <a:lnSpc>
@@ -1524,6 +1636,7 @@
                 <a:spcPts val="0"/>
               </a:spcAft>
               <a:buNone/>
+              <a:defRPr/>
             </a:lvl8pPr>
             <a:lvl9pPr marL="0" indent="0">
               <a:lnSpc>
@@ -1536,6 +1649,7 @@
                 <a:spcPts val="0"/>
               </a:spcAft>
               <a:buNone/>
+              <a:defRPr/>
             </a:lvl9pPr>
           </a:lstStyle>
           <a:p xmlns:a="http://schemas.openxmlformats.org/drawingml/2006/main"/>
@@ -1546,7 +1660,7 @@
           <p:cNvPr id="3" name="Left column">
             <a:extLst xmlns:a="http://schemas.openxmlformats.org/drawingml/2006/main">
               <a:ext uri="{FF2B5EF4-FFF2-40B4-BE49-F238E27FC236}">
-                <a16:creationId xmlns:a16="http://schemas.microsoft.com/office/drawing/2014/main" id="{403FD204-3617-4960-9A16-CDA36469BD52}"/>
+                <a16:creationId xmlns:a16="http://schemas.microsoft.com/office/drawing/2014/main" id="{C26002D2-F2C0-45B8-9866-4E6D1490E836}"/>
               </a:ext>
             </a:extLst>
           </p:cNvPr>
@@ -1587,6 +1701,7 @@
                 <a:spcPts val="1200"/>
               </a:spcAft>
               <a:buChar char="•"/>
+              <a:defRPr/>
             </a:lvl1pPr>
             <a:lvl2pPr marL="533400" indent="-228600">
               <a:lnSpc>
@@ -1599,6 +1714,7 @@
                 <a:spcPts val="1200"/>
               </a:spcAft>
               <a:buChar char="•"/>
+              <a:defRPr/>
             </a:lvl2pPr>
             <a:lvl3pPr marL="838200" indent="-228600">
               <a:lnSpc>
@@ -1611,6 +1727,7 @@
                 <a:spcPts val="1200"/>
               </a:spcAft>
               <a:buChar char="•"/>
+              <a:defRPr/>
             </a:lvl3pPr>
             <a:lvl4pPr marL="1143000" indent="-228600">
               <a:lnSpc>
@@ -1623,6 +1740,7 @@
                 <a:spcPts val="1200"/>
               </a:spcAft>
               <a:buChar char="•"/>
+              <a:defRPr/>
             </a:lvl4pPr>
             <a:lvl5pPr marL="1447800" indent="-228600">
               <a:lnSpc>
@@ -1635,6 +1753,7 @@
                 <a:spcPts val="1200"/>
               </a:spcAft>
               <a:buChar char="•"/>
+              <a:defRPr/>
             </a:lvl5pPr>
             <a:lvl6pPr marL="1752600" indent="-228600">
               <a:lnSpc>
@@ -1647,6 +1766,7 @@
                 <a:spcPts val="1200"/>
               </a:spcAft>
               <a:buChar char="•"/>
+              <a:defRPr/>
             </a:lvl6pPr>
             <a:lvl7pPr marL="2057400" indent="-228600">
               <a:lnSpc>
@@ -1659,6 +1779,7 @@
                 <a:spcPts val="1200"/>
               </a:spcAft>
               <a:buChar char="•"/>
+              <a:defRPr/>
             </a:lvl7pPr>
             <a:lvl8pPr marL="2362200" indent="-228600">
               <a:lnSpc>
@@ -1671,6 +1792,7 @@
                 <a:spcPts val="1200"/>
               </a:spcAft>
               <a:buChar char="•"/>
+              <a:defRPr/>
             </a:lvl8pPr>
             <a:lvl9pPr marL="2667000" indent="-228600">
               <a:lnSpc>
@@ -1683,6 +1805,7 @@
                 <a:spcPts val="1200"/>
               </a:spcAft>
               <a:buChar char="•"/>
+              <a:defRPr/>
             </a:lvl9pPr>
           </a:lstStyle>
           <a:p xmlns:a="http://schemas.openxmlformats.org/drawingml/2006/main"/>
@@ -1693,7 +1816,7 @@
           <p:cNvPr id="4" name="Right column">
             <a:extLst xmlns:a="http://schemas.openxmlformats.org/drawingml/2006/main">
               <a:ext uri="{FF2B5EF4-FFF2-40B4-BE49-F238E27FC236}">
-                <a16:creationId xmlns:a16="http://schemas.microsoft.com/office/drawing/2014/main" id="{0AFAF074-6F1D-44C6-8259-566C19384003}"/>
+                <a16:creationId xmlns:a16="http://schemas.microsoft.com/office/drawing/2014/main" id="{78F29CD4-FA8F-4BBD-A170-10D797646F57}"/>
               </a:ext>
             </a:extLst>
           </p:cNvPr>
@@ -1734,6 +1857,7 @@
                 <a:spcPts val="1200"/>
               </a:spcAft>
               <a:buChar char="•"/>
+              <a:defRPr/>
             </a:lvl1pPr>
             <a:lvl2pPr marL="533400" indent="-228600">
               <a:lnSpc>
@@ -1746,6 +1870,7 @@
                 <a:spcPts val="1200"/>
               </a:spcAft>
               <a:buChar char="•"/>
+              <a:defRPr/>
             </a:lvl2pPr>
             <a:lvl3pPr marL="838200" indent="-228600">
               <a:lnSpc>
@@ -1758,6 +1883,7 @@
                 <a:spcPts val="1200"/>
               </a:spcAft>
               <a:buChar char="•"/>
+              <a:defRPr/>
             </a:lvl3pPr>
             <a:lvl4pPr marL="1143000" indent="-228600">
               <a:lnSpc>
@@ -1770,6 +1896,7 @@
                 <a:spcPts val="1200"/>
               </a:spcAft>
               <a:buChar char="•"/>
+              <a:defRPr/>
             </a:lvl4pPr>
             <a:lvl5pPr marL="1447800" indent="-228600">
               <a:lnSpc>
@@ -1782,6 +1909,7 @@
                 <a:spcPts val="1200"/>
               </a:spcAft>
               <a:buChar char="•"/>
+              <a:defRPr/>
             </a:lvl5pPr>
             <a:lvl6pPr marL="1752600" indent="-228600">
               <a:lnSpc>
@@ -1794,6 +1922,7 @@
                 <a:spcPts val="1200"/>
               </a:spcAft>
               <a:buChar char="•"/>
+              <a:defRPr/>
             </a:lvl6pPr>
             <a:lvl7pPr marL="2057400" indent="-228600">
               <a:lnSpc>
@@ -1806,6 +1935,7 @@
                 <a:spcPts val="1200"/>
               </a:spcAft>
               <a:buChar char="•"/>
+              <a:defRPr/>
             </a:lvl7pPr>
             <a:lvl8pPr marL="2362200" indent="-228600">
               <a:lnSpc>
@@ -1818,6 +1948,7 @@
                 <a:spcPts val="1200"/>
               </a:spcAft>
               <a:buChar char="•"/>
+              <a:defRPr/>
             </a:lvl8pPr>
             <a:lvl9pPr marL="2667000" indent="-228600">
               <a:lnSpc>
@@ -1830,6 +1961,7 @@
                 <a:spcPts val="1200"/>
               </a:spcAft>
               <a:buChar char="•"/>
+              <a:defRPr/>
             </a:lvl9pPr>
           </a:lstStyle>
           <a:p xmlns:a="http://schemas.openxmlformats.org/drawingml/2006/main"/>
@@ -1857,7 +1989,7 @@
           <p:cNvPr id="4" name="Accent rule">
             <a:extLst xmlns:a="http://schemas.openxmlformats.org/drawingml/2006/main">
               <a:ext uri="{FF2B5EF4-FFF2-40B4-BE49-F238E27FC236}">
-                <a16:creationId xmlns:a16="http://schemas.microsoft.com/office/drawing/2014/main" id="{A103B395-D959-4E47-B912-E2FD91DEEA78}"/>
+                <a16:creationId xmlns:a16="http://schemas.microsoft.com/office/drawing/2014/main" id="{9E7F561C-5AE5-41A4-81BC-E9E918ECA8C0}"/>
               </a:ext>
             </a:extLst>
           </p:cNvPr>
@@ -1888,7 +2020,7 @@
           <p:cNvPr id="2" name="Title">
             <a:extLst xmlns:a="http://schemas.openxmlformats.org/drawingml/2006/main">
               <a:ext uri="{FF2B5EF4-FFF2-40B4-BE49-F238E27FC236}">
-                <a16:creationId xmlns:a16="http://schemas.microsoft.com/office/drawing/2014/main" id="{3151E98F-383B-4BEF-B78C-4B46AFD8C26E}"/>
+                <a16:creationId xmlns:a16="http://schemas.microsoft.com/office/drawing/2014/main" id="{54A37B16-7265-48FE-B92D-7845B1049CF6}"/>
               </a:ext>
             </a:extLst>
           </p:cNvPr>
@@ -1929,6 +2061,7 @@
                 <a:spcPts val="0"/>
               </a:spcAft>
               <a:buNone/>
+              <a:defRPr/>
             </a:lvl1pPr>
             <a:lvl2pPr marL="0" indent="0">
               <a:lnSpc>
@@ -1941,6 +2074,7 @@
                 <a:spcPts val="0"/>
               </a:spcAft>
               <a:buNone/>
+              <a:defRPr/>
             </a:lvl2pPr>
             <a:lvl3pPr marL="0" indent="0">
               <a:lnSpc>
@@ -1953,6 +2087,7 @@
                 <a:spcPts val="0"/>
               </a:spcAft>
               <a:buNone/>
+              <a:defRPr/>
             </a:lvl3pPr>
             <a:lvl4pPr marL="0" indent="0">
               <a:lnSpc>
@@ -1965,6 +2100,7 @@
                 <a:spcPts val="0"/>
               </a:spcAft>
               <a:buNone/>
+              <a:defRPr/>
             </a:lvl4pPr>
             <a:lvl5pPr marL="0" indent="0">
               <a:lnSpc>
@@ -1977,6 +2113,7 @@
                 <a:spcPts val="0"/>
               </a:spcAft>
               <a:buNone/>
+              <a:defRPr/>
             </a:lvl5pPr>
             <a:lvl6pPr marL="0" indent="0">
               <a:lnSpc>
@@ -1989,6 +2126,7 @@
                 <a:spcPts val="0"/>
               </a:spcAft>
               <a:buNone/>
+              <a:defRPr/>
             </a:lvl6pPr>
             <a:lvl7pPr marL="0" indent="0">
               <a:lnSpc>
@@ -2001,6 +2139,7 @@
                 <a:spcPts val="0"/>
               </a:spcAft>
               <a:buNone/>
+              <a:defRPr/>
             </a:lvl7pPr>
             <a:lvl8pPr marL="0" indent="0">
               <a:lnSpc>
@@ -2013,6 +2152,7 @@
                 <a:spcPts val="0"/>
               </a:spcAft>
               <a:buNone/>
+              <a:defRPr/>
             </a:lvl8pPr>
             <a:lvl9pPr marL="0" indent="0">
               <a:lnSpc>
@@ -2025,6 +2165,7 @@
                 <a:spcPts val="0"/>
               </a:spcAft>
               <a:buNone/>
+              <a:defRPr/>
             </a:lvl9pPr>
           </a:lstStyle>
           <a:p xmlns:a="http://schemas.openxmlformats.org/drawingml/2006/main"/>
@@ -2035,7 +2176,7 @@
           <p:cNvPr id="3" name="Left column">
             <a:extLst xmlns:a="http://schemas.openxmlformats.org/drawingml/2006/main">
               <a:ext uri="{FF2B5EF4-FFF2-40B4-BE49-F238E27FC236}">
-                <a16:creationId xmlns:a16="http://schemas.microsoft.com/office/drawing/2014/main" id="{136AABFB-88EE-4427-A7D8-9B0BC8801DAC}"/>
+                <a16:creationId xmlns:a16="http://schemas.microsoft.com/office/drawing/2014/main" id="{B6AC10D3-0834-4999-8F7C-78A7D20DCF89}"/>
               </a:ext>
             </a:extLst>
           </p:cNvPr>
@@ -2076,6 +2217,7 @@
                 <a:spcPts val="1200"/>
               </a:spcAft>
               <a:buChar char="•"/>
+              <a:defRPr/>
             </a:lvl1pPr>
             <a:lvl2pPr marL="533400" indent="-228600">
               <a:lnSpc>
@@ -2088,6 +2230,7 @@
                 <a:spcPts val="1200"/>
               </a:spcAft>
               <a:buChar char="•"/>
+              <a:defRPr/>
             </a:lvl2pPr>
             <a:lvl3pPr marL="838200" indent="-228600">
               <a:lnSpc>
@@ -2100,6 +2243,7 @@
                 <a:spcPts val="1200"/>
               </a:spcAft>
               <a:buChar char="•"/>
+              <a:defRPr/>
             </a:lvl3pPr>
             <a:lvl4pPr marL="1143000" indent="-228600">
               <a:lnSpc>
@@ -2112,6 +2256,7 @@
                 <a:spcPts val="1200"/>
               </a:spcAft>
               <a:buChar char="•"/>
+              <a:defRPr/>
             </a:lvl4pPr>
             <a:lvl5pPr marL="1447800" indent="-228600">
               <a:lnSpc>
@@ -2124,6 +2269,7 @@
                 <a:spcPts val="1200"/>
               </a:spcAft>
               <a:buChar char="•"/>
+              <a:defRPr/>
             </a:lvl5pPr>
             <a:lvl6pPr marL="1752600" indent="-228600">
               <a:lnSpc>
@@ -2136,6 +2282,7 @@
                 <a:spcPts val="1200"/>
               </a:spcAft>
               <a:buChar char="•"/>
+              <a:defRPr/>
             </a:lvl6pPr>
             <a:lvl7pPr marL="2057400" indent="-228600">
               <a:lnSpc>
@@ -2148,6 +2295,7 @@
                 <a:spcPts val="1200"/>
               </a:spcAft>
               <a:buChar char="•"/>
+              <a:defRPr/>
             </a:lvl7pPr>
             <a:lvl8pPr marL="2362200" indent="-228600">
               <a:lnSpc>
@@ -2160,6 +2308,7 @@
                 <a:spcPts val="1200"/>
               </a:spcAft>
               <a:buChar char="•"/>
+              <a:defRPr/>
             </a:lvl8pPr>
             <a:lvl9pPr marL="2667000" indent="-228600">
               <a:lnSpc>
@@ -2172,6 +2321,7 @@
                 <a:spcPts val="1200"/>
               </a:spcAft>
               <a:buChar char="•"/>
+              <a:defRPr/>
             </a:lvl9pPr>
           </a:lstStyle>
           <a:p xmlns:a="http://schemas.openxmlformats.org/drawingml/2006/main"/>
@@ -2220,12 +2370,12 @@
   </p:cSld>
   <p:clrMap bg1="lt1" tx1="dk1" bg2="lt2" tx2="dk2" accent1="accent1" accent2="accent2" accent3="accent3" accent4="accent4" accent5="accent5" accent6="accent6" hlink="hlink" folHlink="folHlink"/>
   <p:sldLayoutIdLst>
-    <p:sldLayoutId xmlns:r="http://schemas.openxmlformats.org/officeDocument/2006/relationships" id="2147483649" r:id="Rd5ba0be04f42497e"/>
-    <p:sldLayoutId xmlns:r="http://schemas.openxmlformats.org/officeDocument/2006/relationships" id="2147483650" r:id="R51311013a12647d8"/>
-    <p:sldLayoutId xmlns:r="http://schemas.openxmlformats.org/officeDocument/2006/relationships" id="2147483651" r:id="Reb3676df510f4444"/>
-    <p:sldLayoutId xmlns:r="http://schemas.openxmlformats.org/officeDocument/2006/relationships" id="2147483652" r:id="Rec2c139987a14315"/>
-    <p:sldLayoutId xmlns:r="http://schemas.openxmlformats.org/officeDocument/2006/relationships" id="2147483653" r:id="Rce2ca1b8ebf24137"/>
-    <p:sldLayoutId xmlns:r="http://schemas.openxmlformats.org/officeDocument/2006/relationships" id="2147483654" r:id="Re7211613d5104b07"/>
+    <p:sldLayoutId xmlns:r="http://schemas.openxmlformats.org/officeDocument/2006/relationships" id="2147483649" r:id="R592f81da483840ec"/>
+    <p:sldLayoutId xmlns:r="http://schemas.openxmlformats.org/officeDocument/2006/relationships" id="2147483650" r:id="R39c0e815e7c64a0d"/>
+    <p:sldLayoutId xmlns:r="http://schemas.openxmlformats.org/officeDocument/2006/relationships" id="2147483651" r:id="R32cfdf10b4cb4cf9"/>
+    <p:sldLayoutId xmlns:r="http://schemas.openxmlformats.org/officeDocument/2006/relationships" id="2147483652" r:id="Re9b6fb7ae98c4f1b"/>
+    <p:sldLayoutId xmlns:r="http://schemas.openxmlformats.org/officeDocument/2006/relationships" id="2147483653" r:id="R40798b3f31454826"/>
+    <p:sldLayoutId xmlns:r="http://schemas.openxmlformats.org/officeDocument/2006/relationships" id="2147483654" r:id="R46dd1af4fc164140"/>
   </p:sldLayoutIdLst>
   <p:txStyles>
     <p:titleStyle>
@@ -2776,7 +2926,7 @@
           <p:cNvPr id="19" name="">
             <a:extLst xmlns:a="http://schemas.openxmlformats.org/drawingml/2006/main">
               <a:ext uri="{FF2B5EF4-FFF2-40B4-BE49-F238E27FC236}">
-                <a16:creationId xmlns:a16="http://schemas.microsoft.com/office/drawing/2014/main" id="{24913C7B-771C-4AA5-8E3C-E5E1C2A52FDE}"/>
+                <a16:creationId xmlns:a16="http://schemas.microsoft.com/office/drawing/2014/main" id="{16E8EB96-E03F-4BAE-8C1C-BC1689D74E0B}"/>
               </a:ext>
             </a:extLst>
           </p:cNvPr>
@@ -2805,6 +2955,7 @@
           <a:lstStyle xmlns:a="http://schemas.openxmlformats.org/drawingml/2006/main"/>
           <a:p xmlns:a="http://schemas.openxmlformats.org/drawingml/2006/main">
             <a:pPr>
+              <a:buNone/>
               <a:defRPr sz="3450" b="1">
                 <a:solidFill>
                   <a:srgbClr val="263C3A"/>
@@ -2833,7 +2984,7 @@
           <p:cNvPr id="2" name="">
             <a:extLst xmlns:a="http://schemas.openxmlformats.org/drawingml/2006/main">
               <a:ext uri="{FF2B5EF4-FFF2-40B4-BE49-F238E27FC236}">
-                <a16:creationId xmlns:a16="http://schemas.microsoft.com/office/drawing/2014/main" id="{8957A7E4-DE4A-48C7-BD3E-062840F032C7}"/>
+                <a16:creationId xmlns:a16="http://schemas.microsoft.com/office/drawing/2014/main" id="{8CECBB62-A053-4E04-AF1E-7FA3AC145AE7}"/>
               </a:ext>
             </a:extLst>
           </p:cNvPr>
@@ -2862,6 +3013,7 @@
           <a:lstStyle xmlns:a="http://schemas.openxmlformats.org/drawingml/2006/main"/>
           <a:p xmlns:a="http://schemas.openxmlformats.org/drawingml/2006/main">
             <a:pPr>
+              <a:buNone/>
               <a:defRPr sz="2175" b="0">
                 <a:solidFill>
                   <a:srgbClr val="687572"/>
@@ -2890,7 +3042,7 @@
           <p:cNvPr id="3" name="">
             <a:extLst xmlns:a="http://schemas.openxmlformats.org/drawingml/2006/main">
               <a:ext uri="{FF2B5EF4-FFF2-40B4-BE49-F238E27FC236}">
-                <a16:creationId xmlns:a16="http://schemas.microsoft.com/office/drawing/2014/main" id="{CD6E273A-36E9-46E4-BCDB-7EC5A8366760}"/>
+                <a16:creationId xmlns:a16="http://schemas.microsoft.com/office/drawing/2014/main" id="{1ED73057-F6DF-4D69-A03A-3C266C385621}"/>
               </a:ext>
             </a:extLst>
           </p:cNvPr>
@@ -2920,7 +3072,7 @@
           <p:cNvPr id="4" name="">
             <a:extLst xmlns:a="http://schemas.openxmlformats.org/drawingml/2006/main">
               <a:ext uri="{FF2B5EF4-FFF2-40B4-BE49-F238E27FC236}">
-                <a16:creationId xmlns:a16="http://schemas.microsoft.com/office/drawing/2014/main" id="{A4852DF8-DB1F-4A8A-A43C-EF9A18BEC481}"/>
+                <a16:creationId xmlns:a16="http://schemas.microsoft.com/office/drawing/2014/main" id="{86981272-C5E7-4A20-B96E-C300B2640379}"/>
               </a:ext>
             </a:extLst>
           </p:cNvPr>
@@ -2949,6 +3101,7 @@
           <a:lstStyle xmlns:a="http://schemas.openxmlformats.org/drawingml/2006/main"/>
           <a:p xmlns:a="http://schemas.openxmlformats.org/drawingml/2006/main">
             <a:pPr>
+              <a:buNone/>
               <a:defRPr sz="1575" b="1">
                 <a:solidFill>
                   <a:srgbClr val="263C3A"/>
@@ -2977,7 +3130,7 @@
           <p:cNvPr id="5" name="">
             <a:extLst xmlns:a="http://schemas.openxmlformats.org/drawingml/2006/main">
               <a:ext uri="{FF2B5EF4-FFF2-40B4-BE49-F238E27FC236}">
-                <a16:creationId xmlns:a16="http://schemas.microsoft.com/office/drawing/2014/main" id="{939C4FAE-12B2-430D-9B6D-AC5D9BF62670}"/>
+                <a16:creationId xmlns:a16="http://schemas.microsoft.com/office/drawing/2014/main" id="{51922697-E705-4C84-BF98-2420B7A53DC0}"/>
               </a:ext>
             </a:extLst>
           </p:cNvPr>
@@ -3006,6 +3159,7 @@
           <a:lstStyle xmlns:a="http://schemas.openxmlformats.org/drawingml/2006/main"/>
           <a:p xmlns:a="http://schemas.openxmlformats.org/drawingml/2006/main">
             <a:pPr>
+              <a:buNone/>
               <a:defRPr sz="1575" b="1">
                 <a:solidFill>
                   <a:srgbClr val="263C3A"/>
@@ -3034,7 +3188,7 @@
           <p:cNvPr id="6" name="">
             <a:extLst xmlns:a="http://schemas.openxmlformats.org/drawingml/2006/main">
               <a:ext uri="{FF2B5EF4-FFF2-40B4-BE49-F238E27FC236}">
-                <a16:creationId xmlns:a16="http://schemas.microsoft.com/office/drawing/2014/main" id="{40F85342-7892-4E57-8E74-454BB9DD0D74}"/>
+                <a16:creationId xmlns:a16="http://schemas.microsoft.com/office/drawing/2014/main" id="{B8FB7B22-90C7-4A45-BF84-49A3AEE6F834}"/>
               </a:ext>
             </a:extLst>
           </p:cNvPr>
@@ -3066,7 +3220,7 @@
           <p:cNvPr id="7" name="">
             <a:extLst xmlns:a="http://schemas.openxmlformats.org/drawingml/2006/main">
               <a:ext uri="{FF2B5EF4-FFF2-40B4-BE49-F238E27FC236}">
-                <a16:creationId xmlns:a16="http://schemas.microsoft.com/office/drawing/2014/main" id="{B39A763F-DCA4-4C7C-8B59-A260423EB4B5}"/>
+                <a16:creationId xmlns:a16="http://schemas.microsoft.com/office/drawing/2014/main" id="{83AFE01E-88BB-4ADC-BD7F-F58519D681B9}"/>
               </a:ext>
             </a:extLst>
           </p:cNvPr>
@@ -3096,7 +3250,7 @@
           <p:cNvPr id="8" name="">
             <a:extLst xmlns:a="http://schemas.openxmlformats.org/drawingml/2006/main">
               <a:ext uri="{FF2B5EF4-FFF2-40B4-BE49-F238E27FC236}">
-                <a16:creationId xmlns:a16="http://schemas.microsoft.com/office/drawing/2014/main" id="{D93D75C5-BAE4-49C8-B7AD-C50905F52890}"/>
+                <a16:creationId xmlns:a16="http://schemas.microsoft.com/office/drawing/2014/main" id="{60FB2BBA-E071-4761-89FE-A1DFDC38F8B3}"/>
               </a:ext>
             </a:extLst>
           </p:cNvPr>
@@ -3125,6 +3279,7 @@
           <a:lstStyle xmlns:a="http://schemas.openxmlformats.org/drawingml/2006/main"/>
           <a:p xmlns:a="http://schemas.openxmlformats.org/drawingml/2006/main">
             <a:pPr>
+              <a:buNone/>
               <a:defRPr sz="1350" b="1">
                 <a:solidFill>
                   <a:srgbClr val="263C3A"/>
@@ -3153,7 +3308,7 @@
           <p:cNvPr id="9" name="">
             <a:extLst xmlns:a="http://schemas.openxmlformats.org/drawingml/2006/main">
               <a:ext uri="{FF2B5EF4-FFF2-40B4-BE49-F238E27FC236}">
-                <a16:creationId xmlns:a16="http://schemas.microsoft.com/office/drawing/2014/main" id="{52DE86F9-F86A-4001-9F5E-5F20D796B7C7}"/>
+                <a16:creationId xmlns:a16="http://schemas.microsoft.com/office/drawing/2014/main" id="{B9E41E1F-60BD-4437-A523-D657ADBD3A7B}"/>
               </a:ext>
             </a:extLst>
           </p:cNvPr>
@@ -3182,6 +3337,7 @@
           <a:lstStyle xmlns:a="http://schemas.openxmlformats.org/drawingml/2006/main"/>
           <a:p xmlns:a="http://schemas.openxmlformats.org/drawingml/2006/main">
             <a:pPr>
+              <a:buNone/>
               <a:defRPr sz="1725" b="1">
                 <a:solidFill>
                   <a:srgbClr val="263C3A"/>
@@ -3210,7 +3366,7 @@
           <p:cNvPr id="10" name="">
             <a:extLst xmlns:a="http://schemas.openxmlformats.org/drawingml/2006/main">
               <a:ext uri="{FF2B5EF4-FFF2-40B4-BE49-F238E27FC236}">
-                <a16:creationId xmlns:a16="http://schemas.microsoft.com/office/drawing/2014/main" id="{211218FE-D3E3-4A5A-B7E2-A7B41BFEFC21}"/>
+                <a16:creationId xmlns:a16="http://schemas.microsoft.com/office/drawing/2014/main" id="{BC8F8511-C519-49E6-B2D0-73886F9C3504}"/>
               </a:ext>
             </a:extLst>
           </p:cNvPr>
@@ -3239,6 +3395,7 @@
           <a:lstStyle xmlns:a="http://schemas.openxmlformats.org/drawingml/2006/main"/>
           <a:p xmlns:a="http://schemas.openxmlformats.org/drawingml/2006/main">
             <a:pPr>
+              <a:buNone/>
               <a:defRPr sz="1950" b="0">
                 <a:solidFill>
                   <a:srgbClr val="687572"/>
@@ -3267,7 +3424,7 @@
           <p:cNvPr id="11" name="">
             <a:extLst xmlns:a="http://schemas.openxmlformats.org/drawingml/2006/main">
               <a:ext uri="{FF2B5EF4-FFF2-40B4-BE49-F238E27FC236}">
-                <a16:creationId xmlns:a16="http://schemas.microsoft.com/office/drawing/2014/main" id="{DE63DEC5-B748-4675-90AE-332A195B03FF}"/>
+                <a16:creationId xmlns:a16="http://schemas.microsoft.com/office/drawing/2014/main" id="{EB456371-6BD1-447C-96A1-06B9DB378897}"/>
               </a:ext>
             </a:extLst>
           </p:cNvPr>
@@ -3299,7 +3456,7 @@
           <p:cNvPr id="12" name="">
             <a:extLst xmlns:a="http://schemas.openxmlformats.org/drawingml/2006/main">
               <a:ext uri="{FF2B5EF4-FFF2-40B4-BE49-F238E27FC236}">
-                <a16:creationId xmlns:a16="http://schemas.microsoft.com/office/drawing/2014/main" id="{8B2D3F54-2FB2-42A3-9AD5-9C7221BAB97D}"/>
+                <a16:creationId xmlns:a16="http://schemas.microsoft.com/office/drawing/2014/main" id="{291F93E4-2EDA-4973-AD93-CE0144A5CA3F}"/>
               </a:ext>
             </a:extLst>
           </p:cNvPr>
@@ -3329,7 +3486,7 @@
           <p:cNvPr id="13" name="">
             <a:extLst xmlns:a="http://schemas.openxmlformats.org/drawingml/2006/main">
               <a:ext uri="{FF2B5EF4-FFF2-40B4-BE49-F238E27FC236}">
-                <a16:creationId xmlns:a16="http://schemas.microsoft.com/office/drawing/2014/main" id="{A7982DDF-196C-41DA-BD13-56172E31F688}"/>
+                <a16:creationId xmlns:a16="http://schemas.microsoft.com/office/drawing/2014/main" id="{08BC1BFE-B27E-4CF9-ADA0-B25F8164D98A}"/>
               </a:ext>
             </a:extLst>
           </p:cNvPr>
@@ -3358,6 +3515,7 @@
           <a:lstStyle xmlns:a="http://schemas.openxmlformats.org/drawingml/2006/main"/>
           <a:p xmlns:a="http://schemas.openxmlformats.org/drawingml/2006/main">
             <a:pPr>
+              <a:buNone/>
               <a:defRPr sz="1350" b="1">
                 <a:solidFill>
                   <a:srgbClr val="263C3A"/>
@@ -3386,7 +3544,7 @@
           <p:cNvPr id="14" name="">
             <a:extLst xmlns:a="http://schemas.openxmlformats.org/drawingml/2006/main">
               <a:ext uri="{FF2B5EF4-FFF2-40B4-BE49-F238E27FC236}">
-                <a16:creationId xmlns:a16="http://schemas.microsoft.com/office/drawing/2014/main" id="{6501AEFF-D710-4333-847D-D9B553A1C52F}"/>
+                <a16:creationId xmlns:a16="http://schemas.microsoft.com/office/drawing/2014/main" id="{A8C2E1DF-9F0F-4A16-8DFC-B0E302011535}"/>
               </a:ext>
             </a:extLst>
           </p:cNvPr>
@@ -3415,6 +3573,7 @@
           <a:lstStyle xmlns:a="http://schemas.openxmlformats.org/drawingml/2006/main"/>
           <a:p xmlns:a="http://schemas.openxmlformats.org/drawingml/2006/main">
             <a:pPr>
+              <a:buNone/>
               <a:defRPr sz="1725" b="1">
                 <a:solidFill>
                   <a:srgbClr val="263C3A"/>
@@ -3443,7 +3602,7 @@
           <p:cNvPr id="15" name="">
             <a:extLst xmlns:a="http://schemas.openxmlformats.org/drawingml/2006/main">
               <a:ext uri="{FF2B5EF4-FFF2-40B4-BE49-F238E27FC236}">
-                <a16:creationId xmlns:a16="http://schemas.microsoft.com/office/drawing/2014/main" id="{99E0F913-9F2A-4CA7-93CF-3321DA01C425}"/>
+                <a16:creationId xmlns:a16="http://schemas.microsoft.com/office/drawing/2014/main" id="{3960DF70-1B3D-45A2-A173-3895E75E50AA}"/>
               </a:ext>
             </a:extLst>
           </p:cNvPr>
@@ -3472,6 +3631,7 @@
           <a:lstStyle xmlns:a="http://schemas.openxmlformats.org/drawingml/2006/main"/>
           <a:p xmlns:a="http://schemas.openxmlformats.org/drawingml/2006/main">
             <a:pPr>
+              <a:buNone/>
               <a:defRPr sz="1950" b="0">
                 <a:solidFill>
                   <a:srgbClr val="687572"/>
@@ -3500,7 +3660,7 @@
           <p:cNvPr id="16" name="">
             <a:extLst xmlns:a="http://schemas.openxmlformats.org/drawingml/2006/main">
               <a:ext uri="{FF2B5EF4-FFF2-40B4-BE49-F238E27FC236}">
-                <a16:creationId xmlns:a16="http://schemas.microsoft.com/office/drawing/2014/main" id="{1610CEDF-CA79-4E33-8BFA-DC5C73E74AE9}"/>
+                <a16:creationId xmlns:a16="http://schemas.microsoft.com/office/drawing/2014/main" id="{83AFCDD0-4493-4CD5-A23D-8BE04EDF28D7}"/>
               </a:ext>
             </a:extLst>
           </p:cNvPr>
@@ -3530,7 +3690,7 @@
           <p:cNvPr id="17" name="">
             <a:extLst xmlns:a="http://schemas.openxmlformats.org/drawingml/2006/main">
               <a:ext uri="{FF2B5EF4-FFF2-40B4-BE49-F238E27FC236}">
-                <a16:creationId xmlns:a16="http://schemas.microsoft.com/office/drawing/2014/main" id="{970E003F-FAB5-4C49-9B7E-1DE3172FE700}"/>
+                <a16:creationId xmlns:a16="http://schemas.microsoft.com/office/drawing/2014/main" id="{928A9EC8-3BEB-4F9A-9CF9-1BA1295AB3D6}"/>
               </a:ext>
             </a:extLst>
           </p:cNvPr>
@@ -3559,6 +3719,7 @@
           <a:lstStyle xmlns:a="http://schemas.openxmlformats.org/drawingml/2006/main"/>
           <a:p xmlns:a="http://schemas.openxmlformats.org/drawingml/2006/main">
             <a:pPr>
+              <a:buNone/>
               <a:defRPr sz="1650" b="0">
                 <a:solidFill>
                   <a:srgbClr val="687572"/>
@@ -3587,7 +3748,7 @@
           <p:cNvPr id="18" name="">
             <a:extLst xmlns:a="http://schemas.openxmlformats.org/drawingml/2006/main">
               <a:ext uri="{FF2B5EF4-FFF2-40B4-BE49-F238E27FC236}">
-                <a16:creationId xmlns:a16="http://schemas.microsoft.com/office/drawing/2014/main" id="{7F4FD12D-DC4A-45BC-A2D8-43DF0608DB87}"/>
+                <a16:creationId xmlns:a16="http://schemas.microsoft.com/office/drawing/2014/main" id="{A974EE4B-41F6-40E0-B8B0-19A6A95D558C}"/>
               </a:ext>
             </a:extLst>
           </p:cNvPr>
@@ -3616,6 +3777,7 @@
           <a:lstStyle xmlns:a="http://schemas.openxmlformats.org/drawingml/2006/main"/>
           <a:p xmlns:a="http://schemas.openxmlformats.org/drawingml/2006/main">
             <a:pPr>
+              <a:buNone/>
               <a:defRPr sz="1650" b="0">
                 <a:solidFill>
                   <a:srgbClr val="687572"/>
@@ -3639,10 +3801,79 @@
           </a:p>
         </p:txBody>
       </p:sp>
+      <p:sp>
+        <p:nvSpPr>
+          <p:cNvPr id="20" name="source-credit">
+            <a:extLst xmlns:a="http://schemas.openxmlformats.org/drawingml/2006/main">
+              <a:ext uri="{FF2B5EF4-FFF2-40B4-BE49-F238E27FC236}">
+                <a16:creationId xmlns:a16="http://schemas.microsoft.com/office/drawing/2014/main" id="{9703E170-A75D-4299-963F-0B84BACB48A9}"/>
+              </a:ext>
+            </a:extLst>
+          </p:cNvPr>
+          <p:cNvSpPr>
+            <a:spLocks xmlns:a="http://schemas.openxmlformats.org/drawingml/2006/main" noGrp="1"/>
+          </p:cNvSpPr>
+          <p:nvPr/>
+        </p:nvSpPr>
+        <p:spPr>
+          <a:xfrm xmlns:a="http://schemas.openxmlformats.org/drawingml/2006/main">
+            <a:off x="609600" y="6591300"/>
+            <a:ext cx="10972800" cy="190500"/>
+          </a:xfrm>
+          <a:prstGeom xmlns:a="http://schemas.openxmlformats.org/drawingml/2006/main" prst="rect">
+            <a:avLst/>
+          </a:prstGeom>
+          <a:noFill xmlns:a="http://schemas.openxmlformats.org/drawingml/2006/main"/>
+          <a:ln xmlns:a="http://schemas.openxmlformats.org/drawingml/2006/main" w="0">
+            <a:noFill/>
+          </a:ln>
+        </p:spPr>
+        <p:txBody>
+          <a:bodyPr xmlns:a="http://schemas.openxmlformats.org/drawingml/2006/main" wrap="none" lIns="0" tIns="0" rIns="0" bIns="0" anchor="t">
+            <a:noAutofit/>
+          </a:bodyPr>
+          <a:lstStyle xmlns:a="http://schemas.openxmlformats.org/drawingml/2006/main"/>
+          <a:p xmlns:a="http://schemas.openxmlformats.org/drawingml/2006/main">
+            <a:pPr>
+              <a:defRPr sz="900">
+                <a:solidFill>
+                  <a:srgbClr val="687572"/>
+                </a:solidFill>
+                <a:latin typeface="DejaVu Sans"/>
+                <a:ea typeface="DejaVu Sans"/>
+                <a:cs typeface="DejaVu Sans"/>
+              </a:defRPr>
+            </a:pPr>
+            <a:r>
+              <a:rPr sz="900">
+                <a:solidFill>
+                  <a:srgbClr val="687572"/>
+                </a:solidFill>
+                <a:latin typeface="DejaVu Sans"/>
+                <a:ea typeface="DejaVu Sans"/>
+                <a:cs typeface="DejaVu Sans"/>
+              </a:rPr>
+              <a:t>Source: </a:t>
+            </a:r>
+            <a:r>
+              <a:rPr sz="900">
+                <a:solidFill>
+                  <a:srgbClr val="687572"/>
+                </a:solidFill>
+                <a:latin typeface="DejaVu Sans"/>
+                <a:ea typeface="DejaVu Sans"/>
+                <a:cs typeface="DejaVu Sans"/>
+                <a:hlinkClick xmlns:r="http://schemas.openxmlformats.org/officeDocument/2006/relationships" r:id="Re2b0a1db2a924378"/>
+              </a:rPr>
+              <a:t>Shared visual-cue method; TNT classroom adaptation — original guidance</a:t>
+            </a:r>
+          </a:p>
+        </p:txBody>
+      </p:sp>
     </p:spTree>
     <p:extLst>
       <p:ext uri="{BB962C8B-B14F-4D97-AF65-F5344CB8AC3E}">
-        <p14:creationId xmlns:p14="http://schemas.microsoft.com/office/powerpoint/2010/main" val="1391708206"/>
+        <p14:creationId xmlns:p14="http://schemas.microsoft.com/office/powerpoint/2010/main" val="1255484085"/>
       </p:ext>
     </p:extLst>
   </p:cSld>
